--- a/data/generator-self-regulation-signature/deck.pptx
+++ b/data/generator-self-regulation-signature/deck.pptx
@@ -3672,7 +3672,7 @@
                 </a:solidFill>
                 <a:latin typeface="Calibri"/>
               </a:rPr>
-              <a:t>   Manon's Signature refinement of the hard cap: instead of one distant billion-record ceiling, his ladder sets nearer rungs — 1K, 100K, 1M — each requiring a verification report before the next rung un…</a:t>
+              <a:t>   Manon's Signature refinement of the hard cap: instead of one distant trillion-record ceiling, his ladder sets nearer rungs — 1K, 100K, 1M — each requiring a verification report before the next rung un…</a:t>
             </a:r>
           </a:p>
           <a:p>
